--- a/lessons/4-6/slides.pptx
+++ b/lessons/4-6/slides.pptx
@@ -10905,7 +10905,7 @@
       </p:sp>
       <p:sp>
         <p:nvSpPr>
-          <p:cNvPr id="20" name="Shape 18"/>
+          <p:cNvPr id="20" name="Text 18"/>
           <p:cNvSpPr/>
           <p:nvPr/>
         </p:nvSpPr>
@@ -10926,33 +10926,7 @@
             <a:solidFill>
               <a:srgbClr val="D6DBDF"/>
             </a:solidFill>
-            <a:prstDash val="solid"/>
           </a:ln>
-          <a:effectLst>
-            <a:outerShdw sx="100000" sy="100000" kx="0" ky="0" algn="bl" rotWithShape="0" blurRad="50800" dist="12700" dir="5400000">
-              <a:srgbClr val="1C2E42">
-                <a:alpha val="10000"/>
-              </a:srgbClr>
-            </a:outerShdw>
-          </a:effectLst>
-        </p:spPr>
-      </p:sp>
-      <p:sp>
-        <p:nvSpPr>
-          <p:cNvPr id="21" name="Text 19"/>
-          <p:cNvSpPr/>
-          <p:nvPr/>
-        </p:nvSpPr>
-        <p:spPr>
-          <a:xfrm>
-            <a:off x="685800" y="1481328"/>
-            <a:ext cx="1447800" cy="384048"/>
-          </a:xfrm>
-          <a:prstGeom prst="rect">
-            <a:avLst/>
-          </a:prstGeom>
-          <a:noFill/>
-          <a:ln/>
         </p:spPr>
         <p:txBody>
           <a:bodyPr wrap="square" rtlCol="0" anchor="ctr"/>
@@ -10962,7 +10936,7 @@
               <a:buNone/>
             </a:pPr>
             <a:r>
-              <a:rPr lang="en-US" sz="900" dirty="0">
+              <a:rPr lang="en-US" sz="900" b="1" dirty="0">
                 <a:solidFill>
                   <a:srgbClr val="17324D"/>
                 </a:solidFill>
@@ -10978,7 +10952,7 @@
       </p:sp>
       <p:sp>
         <p:nvSpPr>
-          <p:cNvPr id="22" name="Shape 20"/>
+          <p:cNvPr id="21" name="Text 19"/>
           <p:cNvSpPr/>
           <p:nvPr/>
         </p:nvSpPr>
@@ -10999,33 +10973,7 @@
             <a:solidFill>
               <a:srgbClr val="D6DBDF"/>
             </a:solidFill>
-            <a:prstDash val="solid"/>
           </a:ln>
-          <a:effectLst>
-            <a:outerShdw sx="100000" sy="100000" kx="0" ky="0" algn="bl" rotWithShape="0" blurRad="50800" dist="12700" dir="5400000">
-              <a:srgbClr val="1C2E42">
-                <a:alpha val="10000"/>
-              </a:srgbClr>
-            </a:outerShdw>
-          </a:effectLst>
-        </p:spPr>
-      </p:sp>
-      <p:sp>
-        <p:nvSpPr>
-          <p:cNvPr id="23" name="Text 21"/>
-          <p:cNvSpPr/>
-          <p:nvPr/>
-        </p:nvSpPr>
-        <p:spPr>
-          <a:xfrm>
-            <a:off x="2453640" y="1481328"/>
-            <a:ext cx="1447800" cy="384048"/>
-          </a:xfrm>
-          <a:prstGeom prst="rect">
-            <a:avLst/>
-          </a:prstGeom>
-          <a:noFill/>
-          <a:ln/>
         </p:spPr>
         <p:txBody>
           <a:bodyPr wrap="square" rtlCol="0" anchor="ctr"/>
@@ -11035,7 +10983,7 @@
               <a:buNone/>
             </a:pPr>
             <a:r>
-              <a:rPr lang="en-US" sz="900" dirty="0">
+              <a:rPr lang="en-US" sz="900" b="1" dirty="0">
                 <a:solidFill>
                   <a:srgbClr val="17324D"/>
                 </a:solidFill>
@@ -11051,7 +10999,7 @@
       </p:sp>
       <p:sp>
         <p:nvSpPr>
-          <p:cNvPr id="24" name="Shape 22"/>
+          <p:cNvPr id="22" name="Text 20"/>
           <p:cNvSpPr/>
           <p:nvPr/>
         </p:nvSpPr>
@@ -11072,33 +11020,7 @@
             <a:solidFill>
               <a:srgbClr val="D6DBDF"/>
             </a:solidFill>
-            <a:prstDash val="solid"/>
           </a:ln>
-          <a:effectLst>
-            <a:outerShdw sx="100000" sy="100000" kx="0" ky="0" algn="bl" rotWithShape="0" blurRad="50800" dist="12700" dir="5400000">
-              <a:srgbClr val="1C2E42">
-                <a:alpha val="10000"/>
-              </a:srgbClr>
-            </a:outerShdw>
-          </a:effectLst>
-        </p:spPr>
-      </p:sp>
-      <p:sp>
-        <p:nvSpPr>
-          <p:cNvPr id="25" name="Text 23"/>
-          <p:cNvSpPr/>
-          <p:nvPr/>
-        </p:nvSpPr>
-        <p:spPr>
-          <a:xfrm>
-            <a:off x="4221480" y="1481328"/>
-            <a:ext cx="1447800" cy="384048"/>
-          </a:xfrm>
-          <a:prstGeom prst="rect">
-            <a:avLst/>
-          </a:prstGeom>
-          <a:noFill/>
-          <a:ln/>
         </p:spPr>
         <p:txBody>
           <a:bodyPr wrap="square" rtlCol="0" anchor="ctr"/>
@@ -11108,7 +11030,7 @@
               <a:buNone/>
             </a:pPr>
             <a:r>
-              <a:rPr lang="en-US" sz="900" dirty="0">
+              <a:rPr lang="en-US" sz="900" b="1" dirty="0">
                 <a:solidFill>
                   <a:srgbClr val="17324D"/>
                 </a:solidFill>
@@ -11124,7 +11046,7 @@
       </p:sp>
       <p:sp>
         <p:nvSpPr>
-          <p:cNvPr id="26" name="Shape 24"/>
+          <p:cNvPr id="23" name="Text 21"/>
           <p:cNvSpPr/>
           <p:nvPr/>
         </p:nvSpPr>
@@ -11145,33 +11067,7 @@
             <a:solidFill>
               <a:srgbClr val="D6DBDF"/>
             </a:solidFill>
-            <a:prstDash val="solid"/>
           </a:ln>
-          <a:effectLst>
-            <a:outerShdw sx="100000" sy="100000" kx="0" ky="0" algn="bl" rotWithShape="0" blurRad="50800" dist="12700" dir="5400000">
-              <a:srgbClr val="1C2E42">
-                <a:alpha val="10000"/>
-              </a:srgbClr>
-            </a:outerShdw>
-          </a:effectLst>
-        </p:spPr>
-      </p:sp>
-      <p:sp>
-        <p:nvSpPr>
-          <p:cNvPr id="27" name="Text 25"/>
-          <p:cNvSpPr/>
-          <p:nvPr/>
-        </p:nvSpPr>
-        <p:spPr>
-          <a:xfrm>
-            <a:off x="685800" y="1975104"/>
-            <a:ext cx="1447800" cy="384048"/>
-          </a:xfrm>
-          <a:prstGeom prst="rect">
-            <a:avLst/>
-          </a:prstGeom>
-          <a:noFill/>
-          <a:ln/>
         </p:spPr>
         <p:txBody>
           <a:bodyPr wrap="square" rtlCol="0" anchor="ctr"/>
@@ -11181,7 +11077,7 @@
               <a:buNone/>
             </a:pPr>
             <a:r>
-              <a:rPr lang="en-US" sz="900" dirty="0">
+              <a:rPr lang="en-US" sz="900" b="1" dirty="0">
                 <a:solidFill>
                   <a:srgbClr val="17324D"/>
                 </a:solidFill>
@@ -11197,7 +11093,7 @@
       </p:sp>
       <p:sp>
         <p:nvSpPr>
-          <p:cNvPr id="28" name="Shape 26"/>
+          <p:cNvPr id="24" name="Shape 22"/>
           <p:cNvSpPr/>
           <p:nvPr/>
         </p:nvSpPr>
@@ -11231,7 +11127,7 @@
       </p:sp>
       <p:sp>
         <p:nvSpPr>
-          <p:cNvPr id="29" name="Text 27"/>
+          <p:cNvPr id="25" name="Text 23"/>
           <p:cNvSpPr/>
           <p:nvPr/>
         </p:nvSpPr>
@@ -11272,7 +11168,7 @@
       </p:sp>
       <p:sp>
         <p:nvSpPr>
-          <p:cNvPr id="30" name="Shape 28"/>
+          <p:cNvPr id="26" name="Shape 24"/>
           <p:cNvSpPr/>
           <p:nvPr/>
         </p:nvSpPr>
@@ -11306,7 +11202,7 @@
       </p:sp>
       <p:sp>
         <p:nvSpPr>
-          <p:cNvPr id="31" name="Text 29"/>
+          <p:cNvPr id="27" name="Text 25"/>
           <p:cNvSpPr/>
           <p:nvPr/>
         </p:nvSpPr>
@@ -11347,7 +11243,7 @@
       </p:sp>
       <p:sp>
         <p:nvSpPr>
-          <p:cNvPr id="32" name="Shape 30"/>
+          <p:cNvPr id="28" name="Shape 26"/>
           <p:cNvSpPr/>
           <p:nvPr/>
         </p:nvSpPr>
@@ -11381,7 +11277,7 @@
       </p:sp>
       <p:sp>
         <p:nvSpPr>
-          <p:cNvPr id="33" name="Text 31"/>
+          <p:cNvPr id="29" name="Text 27"/>
           <p:cNvSpPr/>
           <p:nvPr/>
         </p:nvSpPr>
@@ -11422,7 +11318,7 @@
       </p:sp>
       <p:sp>
         <p:nvSpPr>
-          <p:cNvPr id="34" name="Text 32"/>
+          <p:cNvPr id="30" name="Text 28"/>
           <p:cNvSpPr/>
           <p:nvPr/>
         </p:nvSpPr>
@@ -11461,7 +11357,7 @@
       </p:sp>
       <p:sp>
         <p:nvSpPr>
-          <p:cNvPr id="35" name="Shape 33"/>
+          <p:cNvPr id="31" name="Shape 29"/>
           <p:cNvSpPr/>
           <p:nvPr/>
         </p:nvSpPr>
@@ -11484,7 +11380,7 @@
       </p:sp>
       <p:sp>
         <p:nvSpPr>
-          <p:cNvPr id="36" name="Shape 34"/>
+          <p:cNvPr id="32" name="Shape 30"/>
           <p:cNvSpPr/>
           <p:nvPr/>
         </p:nvSpPr>
@@ -11507,7 +11403,7 @@
       </p:sp>
       <p:sp>
         <p:nvSpPr>
-          <p:cNvPr id="37" name="Shape 35"/>
+          <p:cNvPr id="33" name="Shape 31"/>
           <p:cNvSpPr/>
           <p:nvPr/>
         </p:nvSpPr>
@@ -11530,7 +11426,7 @@
       </p:sp>
       <p:sp>
         <p:nvSpPr>
-          <p:cNvPr id="38" name="Shape 36"/>
+          <p:cNvPr id="34" name="Shape 32"/>
           <p:cNvSpPr/>
           <p:nvPr/>
         </p:nvSpPr>
@@ -11553,7 +11449,7 @@
       </p:sp>
       <p:sp>
         <p:nvSpPr>
-          <p:cNvPr id="39" name="Shape 37"/>
+          <p:cNvPr id="35" name="Shape 33"/>
           <p:cNvSpPr/>
           <p:nvPr/>
         </p:nvSpPr>

--- a/lessons/4-6/slides.pptx
+++ b/lessons/4-6/slides.pptx
@@ -2495,7 +2495,7 @@
                 <a:ea typeface="Outfit" pitchFamily="34" charset="-122"/>
                 <a:cs typeface="Outfit" pitchFamily="34" charset="-120"/>
               </a:rPr>
-              <a:t>6.RP.3d</a:t>
+              <a:t>6.AT.3c</a:t>
             </a:r>
             <a:endParaRPr lang="en-US" sz="1000" dirty="0"/>
           </a:p>
@@ -3218,7 +3218,7 @@
                 <a:ea typeface="Outfit" pitchFamily="34" charset="-122"/>
                 <a:cs typeface="Outfit" pitchFamily="34" charset="-120"/>
               </a:rPr>
-              <a:t>6.RP.3d</a:t>
+              <a:t>6.AT.3c</a:t>
             </a:r>
             <a:endParaRPr lang="en-US" sz="900" dirty="0"/>
           </a:p>
@@ -4328,7 +4328,7 @@
                 <a:ea typeface="Outfit" pitchFamily="34" charset="-122"/>
                 <a:cs typeface="Outfit" pitchFamily="34" charset="-120"/>
               </a:rPr>
-              <a:t>6.RP.3d</a:t>
+              <a:t>6.AT.3c</a:t>
             </a:r>
             <a:endParaRPr lang="en-US" sz="900" dirty="0"/>
           </a:p>
@@ -5664,7 +5664,7 @@
                 <a:ea typeface="Outfit" pitchFamily="34" charset="-122"/>
                 <a:cs typeface="Outfit" pitchFamily="34" charset="-120"/>
               </a:rPr>
-              <a:t>6.RP.3d</a:t>
+              <a:t>6.AT.3c</a:t>
             </a:r>
             <a:endParaRPr lang="en-US" sz="900" dirty="0"/>
           </a:p>
@@ -6860,7 +6860,7 @@
                 <a:ea typeface="Outfit" pitchFamily="34" charset="-122"/>
                 <a:cs typeface="Outfit" pitchFamily="34" charset="-120"/>
               </a:rPr>
-              <a:t>6.RP.3d</a:t>
+              <a:t>6.AT.3c</a:t>
             </a:r>
             <a:endParaRPr lang="en-US" sz="900" dirty="0"/>
           </a:p>
@@ -7922,7 +7922,7 @@
                 <a:ea typeface="Outfit" pitchFamily="34" charset="-122"/>
                 <a:cs typeface="Outfit" pitchFamily="34" charset="-120"/>
               </a:rPr>
-              <a:t>6.RP.3d</a:t>
+              <a:t>6.AT.3c</a:t>
             </a:r>
             <a:endParaRPr lang="en-US" sz="900" dirty="0"/>
           </a:p>
@@ -8887,7 +8887,7 @@
                 <a:ea typeface="Outfit" pitchFamily="34" charset="-122"/>
                 <a:cs typeface="Outfit" pitchFamily="34" charset="-120"/>
               </a:rPr>
-              <a:t>6.RP.3d</a:t>
+              <a:t>6.AT.3c</a:t>
             </a:r>
             <a:endParaRPr lang="en-US" sz="900" dirty="0"/>
           </a:p>
@@ -9804,7 +9804,7 @@
                 <a:ea typeface="Outfit" pitchFamily="34" charset="-122"/>
                 <a:cs typeface="Outfit" pitchFamily="34" charset="-120"/>
               </a:rPr>
-              <a:t>6.RP.3d</a:t>
+              <a:t>6.AT.3c</a:t>
             </a:r>
             <a:endParaRPr lang="en-US" sz="900" dirty="0"/>
           </a:p>
@@ -10932,7 +10932,7 @@
                 <a:ea typeface="Outfit" pitchFamily="34" charset="-122"/>
                 <a:cs typeface="Outfit" pitchFamily="34" charset="-120"/>
               </a:rPr>
-              <a:t>6.RP.3d</a:t>
+              <a:t>6.AT.3c</a:t>
             </a:r>
             <a:endParaRPr lang="en-US" sz="900" dirty="0"/>
           </a:p>
@@ -12365,7 +12365,7 @@
                 <a:ea typeface="Outfit" pitchFamily="34" charset="-122"/>
                 <a:cs typeface="Outfit" pitchFamily="34" charset="-120"/>
               </a:rPr>
-              <a:t>6.RP.3d</a:t>
+              <a:t>6.AT.3c</a:t>
             </a:r>
             <a:endParaRPr lang="en-US" sz="900" dirty="0"/>
           </a:p>
@@ -13179,7 +13179,7 @@
                 <a:ea typeface="Outfit" pitchFamily="34" charset="-122"/>
                 <a:cs typeface="Outfit" pitchFamily="34" charset="-120"/>
               </a:rPr>
-              <a:t>6.RP.3d</a:t>
+              <a:t>6.AT.3c</a:t>
             </a:r>
             <a:endParaRPr lang="en-US" sz="900" dirty="0"/>
           </a:p>
@@ -14239,7 +14239,7 @@
                 <a:ea typeface="Outfit" pitchFamily="34" charset="-122"/>
                 <a:cs typeface="Outfit" pitchFamily="34" charset="-120"/>
               </a:rPr>
-              <a:t>6.RP.3d</a:t>
+              <a:t>6.AT.3c</a:t>
             </a:r>
             <a:endParaRPr lang="en-US" sz="900" dirty="0"/>
           </a:p>
@@ -15346,7 +15346,7 @@
                 <a:ea typeface="Outfit" pitchFamily="34" charset="-122"/>
                 <a:cs typeface="Outfit" pitchFamily="34" charset="-120"/>
               </a:rPr>
-              <a:t>6.RP.3d</a:t>
+              <a:t>6.AT.3c</a:t>
             </a:r>
             <a:endParaRPr lang="en-US" sz="900" dirty="0"/>
           </a:p>
@@ -16406,7 +16406,7 @@
                 <a:ea typeface="Outfit" pitchFamily="34" charset="-122"/>
                 <a:cs typeface="Outfit" pitchFamily="34" charset="-120"/>
               </a:rPr>
-              <a:t>6.RP.3d</a:t>
+              <a:t>6.AT.3c</a:t>
             </a:r>
             <a:endParaRPr lang="en-US" sz="900" dirty="0"/>
           </a:p>
@@ -17466,7 +17466,7 @@
                 <a:ea typeface="Outfit" pitchFamily="34" charset="-122"/>
                 <a:cs typeface="Outfit" pitchFamily="34" charset="-120"/>
               </a:rPr>
-              <a:t>6.RP.3d</a:t>
+              <a:t>6.AT.3c</a:t>
             </a:r>
             <a:endParaRPr lang="en-US" sz="900" dirty="0"/>
           </a:p>
@@ -18434,7 +18434,7 @@
                 <a:ea typeface="Outfit" pitchFamily="34" charset="-122"/>
                 <a:cs typeface="Outfit" pitchFamily="34" charset="-120"/>
               </a:rPr>
-              <a:t>6.RP.3d</a:t>
+              <a:t>6.AT.3c</a:t>
             </a:r>
             <a:endParaRPr lang="en-US" sz="900" dirty="0"/>
           </a:p>
@@ -20613,7 +20613,7 @@
                 <a:ea typeface="Outfit" pitchFamily="34" charset="-122"/>
                 <a:cs typeface="Outfit" pitchFamily="34" charset="-120"/>
               </a:rPr>
-              <a:t>6.RP.3d</a:t>
+              <a:t>6.AT.3c</a:t>
             </a:r>
             <a:endParaRPr lang="en-US" sz="900" dirty="0"/>
           </a:p>
@@ -21289,14 +21289,73 @@
       </p:sp>
       <p:sp>
         <p:nvSpPr>
-          <p:cNvPr id="29" name="Text 27"/>
-          <p:cNvSpPr/>
-          <p:nvPr/>
-        </p:nvSpPr>
-        <p:spPr>
-          <a:xfrm>
-            <a:off x="594360" y="3886200"/>
-            <a:ext cx="5120640" cy="228600"/>
+          <p:cNvPr id="29" name="Shape 27"/>
+          <p:cNvSpPr/>
+          <p:nvPr/>
+        </p:nvSpPr>
+        <p:spPr>
+          <a:xfrm>
+            <a:off x="640080" y="3035808"/>
+            <a:ext cx="274320" cy="274320"/>
+          </a:xfrm>
+          <a:prstGeom prst="ellipse">
+            <a:avLst/>
+          </a:prstGeom>
+          <a:solidFill>
+            <a:srgbClr val="B0883B"/>
+          </a:solidFill>
+          <a:ln/>
+        </p:spPr>
+      </p:sp>
+      <p:sp>
+        <p:nvSpPr>
+          <p:cNvPr id="30" name="Text 28"/>
+          <p:cNvSpPr/>
+          <p:nvPr/>
+        </p:nvSpPr>
+        <p:spPr>
+          <a:xfrm>
+            <a:off x="640080" y="3035808"/>
+            <a:ext cx="274320" cy="274320"/>
+          </a:xfrm>
+          <a:prstGeom prst="rect">
+            <a:avLst/>
+          </a:prstGeom>
+          <a:noFill/>
+          <a:ln/>
+        </p:spPr>
+        <p:txBody>
+          <a:bodyPr wrap="square" rtlCol="0" anchor="ctr"/>
+          <a:lstStyle/>
+          <a:p>
+            <a:pPr algn="ctr" indent="0" marL="0">
+              <a:buNone/>
+            </a:pPr>
+            <a:r>
+              <a:rPr lang="en-US" sz="1100" b="1" dirty="0">
+                <a:solidFill>
+                  <a:srgbClr val="FFFFFF"/>
+                </a:solidFill>
+                <a:latin typeface="Outfit" pitchFamily="34" charset="0"/>
+                <a:ea typeface="Outfit" pitchFamily="34" charset="-122"/>
+                <a:cs typeface="Outfit" pitchFamily="34" charset="-120"/>
+              </a:rPr>
+              <a:t>4</a:t>
+            </a:r>
+            <a:endParaRPr lang="en-US" sz="1100" dirty="0"/>
+          </a:p>
+        </p:txBody>
+      </p:sp>
+      <p:sp>
+        <p:nvSpPr>
+          <p:cNvPr id="31" name="Text 29"/>
+          <p:cNvSpPr/>
+          <p:nvPr/>
+        </p:nvSpPr>
+        <p:spPr>
+          <a:xfrm>
+            <a:off x="1024128" y="2980944"/>
+            <a:ext cx="4828032" cy="420624"/>
           </a:xfrm>
           <a:prstGeom prst="rect">
             <a:avLst/>
@@ -21312,14 +21371,151 @@
               <a:buNone/>
             </a:pPr>
             <a:r>
-              <a:rPr lang="en-US" sz="900" i="1" dirty="0">
-                <a:solidFill>
-                  <a:srgbClr val="8A96A3"/>
+              <a:rPr lang="en-US" sz="1050" dirty="0">
+                <a:solidFill>
+                  <a:srgbClr val="24323F"/>
                 </a:solidFill>
                 <a:latin typeface="Hanken Grotesk" pitchFamily="34" charset="0"/>
                 <a:ea typeface="Hanken Grotesk" pitchFamily="34" charset="-122"/>
                 <a:cs typeface="Hanken Grotesk" pitchFamily="34" charset="-120"/>
               </a:rPr>
+              <a:t>Now a metric example: a power cable is 3 meters long. The factor is 1 meter = 100 centimeters.</a:t>
+            </a:r>
+            <a:endParaRPr lang="en-US" sz="1050" dirty="0"/>
+          </a:p>
+        </p:txBody>
+      </p:sp>
+      <p:sp>
+        <p:nvSpPr>
+          <p:cNvPr id="32" name="Shape 30"/>
+          <p:cNvSpPr/>
+          <p:nvPr/>
+        </p:nvSpPr>
+        <p:spPr>
+          <a:xfrm>
+            <a:off x="640080" y="3511296"/>
+            <a:ext cx="274320" cy="274320"/>
+          </a:xfrm>
+          <a:prstGeom prst="ellipse">
+            <a:avLst/>
+          </a:prstGeom>
+          <a:solidFill>
+            <a:srgbClr val="B0883B"/>
+          </a:solidFill>
+          <a:ln/>
+        </p:spPr>
+      </p:sp>
+      <p:sp>
+        <p:nvSpPr>
+          <p:cNvPr id="33" name="Text 31"/>
+          <p:cNvSpPr/>
+          <p:nvPr/>
+        </p:nvSpPr>
+        <p:spPr>
+          <a:xfrm>
+            <a:off x="640080" y="3511296"/>
+            <a:ext cx="274320" cy="274320"/>
+          </a:xfrm>
+          <a:prstGeom prst="rect">
+            <a:avLst/>
+          </a:prstGeom>
+          <a:noFill/>
+          <a:ln/>
+        </p:spPr>
+        <p:txBody>
+          <a:bodyPr wrap="square" rtlCol="0" anchor="ctr"/>
+          <a:lstStyle/>
+          <a:p>
+            <a:pPr algn="ctr" indent="0" marL="0">
+              <a:buNone/>
+            </a:pPr>
+            <a:r>
+              <a:rPr lang="en-US" sz="1100" b="1" dirty="0">
+                <a:solidFill>
+                  <a:srgbClr val="FFFFFF"/>
+                </a:solidFill>
+                <a:latin typeface="Outfit" pitchFamily="34" charset="0"/>
+                <a:ea typeface="Outfit" pitchFamily="34" charset="-122"/>
+                <a:cs typeface="Outfit" pitchFamily="34" charset="-120"/>
+              </a:rPr>
+              <a:t>5</a:t>
+            </a:r>
+            <a:endParaRPr lang="en-US" sz="1100" dirty="0"/>
+          </a:p>
+        </p:txBody>
+      </p:sp>
+      <p:sp>
+        <p:nvSpPr>
+          <p:cNvPr id="34" name="Text 32"/>
+          <p:cNvSpPr/>
+          <p:nvPr/>
+        </p:nvSpPr>
+        <p:spPr>
+          <a:xfrm>
+            <a:off x="1024128" y="3456432"/>
+            <a:ext cx="4828032" cy="420624"/>
+          </a:xfrm>
+          <a:prstGeom prst="rect">
+            <a:avLst/>
+          </a:prstGeom>
+          <a:noFill/>
+          <a:ln/>
+        </p:spPr>
+        <p:txBody>
+          <a:bodyPr wrap="square" rtlCol="0" anchor="ctr"/>
+          <a:lstStyle/>
+          <a:p>
+            <a:pPr indent="0" marL="0">
+              <a:buNone/>
+            </a:pPr>
+            <a:r>
+              <a:rPr lang="en-US" sz="1050" dirty="0">
+                <a:solidFill>
+                  <a:srgbClr val="24323F"/>
+                </a:solidFill>
+                <a:latin typeface="Hanken Grotesk" pitchFamily="34" charset="0"/>
+                <a:ea typeface="Hanken Grotesk" pitchFamily="34" charset="-122"/>
+                <a:cs typeface="Hanken Grotesk" pitchFamily="34" charset="-120"/>
+              </a:rPr>
+              <a:t>Centimeters are smaller than meters, so we multiply: 3 × 100 = 300 centimeters.</a:t>
+            </a:r>
+            <a:endParaRPr lang="en-US" sz="1050" dirty="0"/>
+          </a:p>
+        </p:txBody>
+      </p:sp>
+      <p:sp>
+        <p:nvSpPr>
+          <p:cNvPr id="35" name="Text 33"/>
+          <p:cNvSpPr/>
+          <p:nvPr/>
+        </p:nvSpPr>
+        <p:spPr>
+          <a:xfrm>
+            <a:off x="594360" y="3886200"/>
+            <a:ext cx="5120640" cy="228600"/>
+          </a:xfrm>
+          <a:prstGeom prst="rect">
+            <a:avLst/>
+          </a:prstGeom>
+          <a:noFill/>
+          <a:ln/>
+        </p:spPr>
+        <p:txBody>
+          <a:bodyPr wrap="square" rtlCol="0" anchor="ctr"/>
+          <a:lstStyle/>
+          <a:p>
+            <a:pPr indent="0" marL="0">
+              <a:buNone/>
+            </a:pPr>
+            <a:r>
+              <a:rPr lang="en-US" sz="900" i="1" dirty="0">
+                <a:solidFill>
+                  <a:srgbClr val="8A96A3"/>
+                </a:solidFill>
+                <a:latin typeface="Hanken Grotesk" pitchFamily="34" charset="0"/>
+                <a:ea typeface="Hanken Grotesk" pitchFamily="34" charset="-122"/>
+                <a:cs typeface="Hanken Grotesk" pitchFamily="34" charset="-120"/>
+              </a:rPr>
               <a:t>Your turn — show your work:</a:t>
             </a:r>
             <a:endParaRPr lang="en-US" sz="900" dirty="0"/>
@@ -21328,7 +21524,7 @@
       </p:sp>
       <p:sp>
         <p:nvSpPr>
-          <p:cNvPr id="30" name="Shape 28"/>
+          <p:cNvPr id="36" name="Shape 34"/>
           <p:cNvSpPr/>
           <p:nvPr/>
         </p:nvSpPr>
@@ -21351,7 +21547,7 @@
       </p:sp>
       <p:sp>
         <p:nvSpPr>
-          <p:cNvPr id="31" name="Shape 29"/>
+          <p:cNvPr id="37" name="Shape 35"/>
           <p:cNvSpPr/>
           <p:nvPr/>
         </p:nvSpPr>
@@ -21385,7 +21581,7 @@
       </p:sp>
       <p:sp>
         <p:nvSpPr>
-          <p:cNvPr id="32" name="Text 30"/>
+          <p:cNvPr id="38" name="Text 36"/>
           <p:cNvSpPr/>
           <p:nvPr/>
         </p:nvSpPr>
@@ -21426,7 +21622,7 @@
       </p:sp>
       <p:sp>
         <p:nvSpPr>
-          <p:cNvPr id="33" name="Text 31"/>
+          <p:cNvPr id="39" name="Text 37"/>
           <p:cNvSpPr/>
           <p:nvPr/>
         </p:nvSpPr>
@@ -21465,7 +21661,7 @@
       </p:sp>
       <p:sp>
         <p:nvSpPr>
-          <p:cNvPr id="34" name="Shape 32"/>
+          <p:cNvPr id="40" name="Shape 38"/>
           <p:cNvSpPr/>
           <p:nvPr/>
         </p:nvSpPr>
@@ -21499,7 +21695,7 @@
       </p:sp>
       <p:sp>
         <p:nvSpPr>
-          <p:cNvPr id="35" name="Text 33"/>
+          <p:cNvPr id="41" name="Text 39"/>
           <p:cNvSpPr/>
           <p:nvPr/>
         </p:nvSpPr>
@@ -21538,7 +21734,7 @@
       </p:sp>
       <p:sp>
         <p:nvSpPr>
-          <p:cNvPr id="36" name="Text 34"/>
+          <p:cNvPr id="42" name="Text 40"/>
           <p:cNvSpPr/>
           <p:nvPr/>
         </p:nvSpPr>
